--- a/docs/DB_주문_시연_발표_최신.pptx
+++ b/docs/DB_주문_시연_발표_최신.pptx
@@ -2,25 +2,25 @@
 <file path=ppt/presentation.xml><?xml version="1.0" encoding="utf-8"?>
 <p:presentation xmlns:p="http://schemas.openxmlformats.org/presentationml/2006/main">
   <p:sldMasterIdLst>
-    <p:sldMasterId xmlns:r="http://schemas.openxmlformats.org/officeDocument/2006/relationships" id="2147483648" r:id="R78ee859c95314e12"/>
+    <p:sldMasterId xmlns:r="http://schemas.openxmlformats.org/officeDocument/2006/relationships" id="2147483648" r:id="Rb2e49c000fc44ec9"/>
   </p:sldMasterIdLst>
   <p:notesMasterIdLst>
-    <p:notesMasterId xmlns:r="http://schemas.openxmlformats.org/officeDocument/2006/relationships" r:id="Ref97452208724a51"/>
+    <p:notesMasterId xmlns:r="http://schemas.openxmlformats.org/officeDocument/2006/relationships" r:id="R393b9c82c71b4893"/>
   </p:notesMasterIdLst>
   <p:sldIdLst>
-    <p:sldId xmlns:r="http://schemas.openxmlformats.org/officeDocument/2006/relationships" id="256" r:id="R8e57429bb35d4d4d"/>
-    <p:sldId xmlns:r="http://schemas.openxmlformats.org/officeDocument/2006/relationships" id="257" r:id="R7e5c1afdc0554103"/>
-    <p:sldId xmlns:r="http://schemas.openxmlformats.org/officeDocument/2006/relationships" id="258" r:id="Rd9d951ee14924cd2"/>
-    <p:sldId xmlns:r="http://schemas.openxmlformats.org/officeDocument/2006/relationships" id="259" r:id="Rc174a4a699da4129"/>
-    <p:sldId xmlns:r="http://schemas.openxmlformats.org/officeDocument/2006/relationships" id="260" r:id="Rcf7f32952667435f"/>
-    <p:sldId xmlns:r="http://schemas.openxmlformats.org/officeDocument/2006/relationships" id="261" r:id="R6ce1211bbee74606"/>
-    <p:sldId xmlns:r="http://schemas.openxmlformats.org/officeDocument/2006/relationships" id="262" r:id="Rfbe91d840c224c1d"/>
-    <p:sldId xmlns:r="http://schemas.openxmlformats.org/officeDocument/2006/relationships" id="263" r:id="R7bfb3ef9fd164a82"/>
-    <p:sldId xmlns:r="http://schemas.openxmlformats.org/officeDocument/2006/relationships" id="264" r:id="R6bc964293d06428d"/>
-    <p:sldId xmlns:r="http://schemas.openxmlformats.org/officeDocument/2006/relationships" id="265" r:id="Rccb96636d5dc4829"/>
-    <p:sldId xmlns:r="http://schemas.openxmlformats.org/officeDocument/2006/relationships" id="266" r:id="R5de75c8b60df4ff9"/>
-    <p:sldId xmlns:r="http://schemas.openxmlformats.org/officeDocument/2006/relationships" id="267" r:id="Rcdd9f86a866f4a4f"/>
-    <p:sldId xmlns:r="http://schemas.openxmlformats.org/officeDocument/2006/relationships" id="268" r:id="R6a0737bd522b4bd4"/>
+    <p:sldId xmlns:r="http://schemas.openxmlformats.org/officeDocument/2006/relationships" id="256" r:id="R8a9cddcdb4454262"/>
+    <p:sldId xmlns:r="http://schemas.openxmlformats.org/officeDocument/2006/relationships" id="257" r:id="R8efacf7206564aae"/>
+    <p:sldId xmlns:r="http://schemas.openxmlformats.org/officeDocument/2006/relationships" id="258" r:id="Rd8cf07e5d87c423b"/>
+    <p:sldId xmlns:r="http://schemas.openxmlformats.org/officeDocument/2006/relationships" id="259" r:id="R3ca40f57e7a6411a"/>
+    <p:sldId xmlns:r="http://schemas.openxmlformats.org/officeDocument/2006/relationships" id="260" r:id="R493044d5dcad41b3"/>
+    <p:sldId xmlns:r="http://schemas.openxmlformats.org/officeDocument/2006/relationships" id="261" r:id="R8001d61ead534e6f"/>
+    <p:sldId xmlns:r="http://schemas.openxmlformats.org/officeDocument/2006/relationships" id="262" r:id="Re1d5751e568e403f"/>
+    <p:sldId xmlns:r="http://schemas.openxmlformats.org/officeDocument/2006/relationships" id="263" r:id="Rf609e16f5538443c"/>
+    <p:sldId xmlns:r="http://schemas.openxmlformats.org/officeDocument/2006/relationships" id="264" r:id="Raac62cfd76e343ba"/>
+    <p:sldId xmlns:r="http://schemas.openxmlformats.org/officeDocument/2006/relationships" id="265" r:id="R4bc4be2925954b1f"/>
+    <p:sldId xmlns:r="http://schemas.openxmlformats.org/officeDocument/2006/relationships" id="266" r:id="Rb06409f3bf8c4f12"/>
+    <p:sldId xmlns:r="http://schemas.openxmlformats.org/officeDocument/2006/relationships" id="267" r:id="R337079604be1420b"/>
+    <p:sldId xmlns:r="http://schemas.openxmlformats.org/officeDocument/2006/relationships" id="268" r:id="Rd9309570209d4a4e"/>
   </p:sldIdLst>
   <p:sldSz cx="12192000" cy="6858000"/>
   <p:notesSz cx="6858000" cy="9144000"/>
@@ -1482,7 +1482,7 @@
   </p:cSld>
   <p:clrMap bg1="lt1" tx1="dk1" bg2="lt2" tx2="dk2" accent1="accent1" accent2="accent2" accent3="accent3" accent4="accent4" accent5="accent5" accent6="accent6" hlink="hlink" folHlink="folHlink"/>
   <p:sldLayoutIdLst>
-    <p:sldLayoutId xmlns:r="http://schemas.openxmlformats.org/officeDocument/2006/relationships" id="2147483649" r:id="R3f2bd5686d884122"/>
+    <p:sldLayoutId xmlns:r="http://schemas.openxmlformats.org/officeDocument/2006/relationships" id="2147483649" r:id="R84c954c4a9434875"/>
   </p:sldLayoutIdLst>
   <p:txStyles>
     <p:titleStyle>
@@ -2409,7 +2409,7 @@
           <p:nvPr/>
         </p:nvPicPr>
         <p:blipFill>
-          <a:blip xmlns:r="http://schemas.openxmlformats.org/officeDocument/2006/relationships" xmlns:a="http://schemas.openxmlformats.org/drawingml/2006/main" r:embed="R4a84937fe39d457e"/>
+          <a:blip xmlns:r="http://schemas.openxmlformats.org/officeDocument/2006/relationships" xmlns:a="http://schemas.openxmlformats.org/drawingml/2006/main" r:embed="R7fe1c74551dc4731"/>
           <a:stretch xmlns:a="http://schemas.openxmlformats.org/drawingml/2006/main"/>
         </p:blipFill>
         <p:spPr>
@@ -2475,7 +2475,18 @@
                 <a:ea typeface="Malgun Gothic"/>
                 <a:cs typeface="Malgun Gothic"/>
               </a:rPr>
-              <a:t>양석호 / 노트북 실행과 SQL 시연</a:t>
+              <a:t>3조</a:t>
+            </a:r>
+            <a:r>
+              <a:rPr sz="1725" b="0">
+                <a:solidFill>
+                  <a:srgbClr val="132D3D"/>
+                </a:solidFill>
+                <a:latin typeface="Malgun Gothic"/>
+                <a:ea typeface="Malgun Gothic"/>
+                <a:cs typeface="Malgun Gothic"/>
+              </a:rPr>
+              <a:t> / 노트북 실행과 SQL 시연</a:t>
             </a:r>
           </a:p>
         </p:txBody>
@@ -5793,7 +5804,7 @@
           <p:nvPr/>
         </p:nvPicPr>
         <p:blipFill>
-          <a:blip xmlns:r="http://schemas.openxmlformats.org/officeDocument/2006/relationships" xmlns:a="http://schemas.openxmlformats.org/drawingml/2006/main" r:embed="R9052241296d24655"/>
+          <a:blip xmlns:r="http://schemas.openxmlformats.org/officeDocument/2006/relationships" xmlns:a="http://schemas.openxmlformats.org/drawingml/2006/main" r:embed="R04ef09211a3841e7"/>
           <a:stretch xmlns:a="http://schemas.openxmlformats.org/drawingml/2006/main"/>
         </p:blipFill>
         <p:spPr>
